--- a/week-14-machine_learning/week-14-pingouin-slides.pptx
+++ b/week-14-machine_learning/week-14-pingouin-slides.pptx
@@ -10226,7 +10226,7 @@
           <a:p>
             <a:pPr algn="l"/>
             <a:r>
-              <a:rPr sz="3000" b="1" i="0">
+              <a:rPr sz="3000" b="1" i="0" dirty="0" err="1">
                 <a:solidFill>
                   <a:srgbClr val="1A1A2E"/>
                 </a:solidFill>
